--- a/Reporte 240626.pptx
+++ b/Reporte 240626.pptx
@@ -6510,10 +6510,10 @@
       </p:sp>
       <p:pic>
         <p:nvPicPr>
-          <p:cNvPr id="4" name="Imagen 3">
+          <p:cNvPr id="5" name="Imagen 4">
             <a:extLst>
               <a:ext uri="{FF2B5EF4-FFF2-40B4-BE49-F238E27FC236}">
-                <a16:creationId xmlns:a16="http://schemas.microsoft.com/office/drawing/2014/main" id="{7A738124-AC9E-44F1-FA9A-91110BD551C6}"/>
+                <a16:creationId xmlns:a16="http://schemas.microsoft.com/office/drawing/2014/main" id="{8758A578-A219-EF4B-60CD-0838FD2927F1}"/>
               </a:ext>
             </a:extLst>
           </p:cNvPr>
@@ -6530,8 +6530,8 @@
         </p:blipFill>
         <p:spPr>
           <a:xfrm>
-            <a:off x="0" y="779104"/>
-            <a:ext cx="9144000" cy="3585291"/>
+            <a:off x="0" y="876050"/>
+            <a:ext cx="9144000" cy="3534276"/>
           </a:xfrm>
           <a:prstGeom prst="rect">
             <a:avLst/>
@@ -6608,10 +6608,10 @@
       </p:sp>
       <p:pic>
         <p:nvPicPr>
-          <p:cNvPr id="3" name="Imagen 2">
+          <p:cNvPr id="4" name="Imagen 3">
             <a:extLst>
               <a:ext uri="{FF2B5EF4-FFF2-40B4-BE49-F238E27FC236}">
-                <a16:creationId xmlns:a16="http://schemas.microsoft.com/office/drawing/2014/main" id="{CFFAA655-0F52-2415-7046-22E2D05647DF}"/>
+                <a16:creationId xmlns:a16="http://schemas.microsoft.com/office/drawing/2014/main" id="{2545EBEC-6AE2-3DB9-11BF-D62AEF19AB3E}"/>
               </a:ext>
             </a:extLst>
           </p:cNvPr>
@@ -6628,8 +6628,8 @@
         </p:blipFill>
         <p:spPr>
           <a:xfrm>
-            <a:off x="0" y="1442577"/>
-            <a:ext cx="9144000" cy="2632746"/>
+            <a:off x="0" y="1352033"/>
+            <a:ext cx="9144000" cy="2582310"/>
           </a:xfrm>
           <a:prstGeom prst="rect">
             <a:avLst/>
@@ -6712,10 +6712,10 @@
       </p:sp>
       <p:pic>
         <p:nvPicPr>
-          <p:cNvPr id="3" name="Imagen 2">
+          <p:cNvPr id="4" name="Imagen 3">
             <a:extLst>
               <a:ext uri="{FF2B5EF4-FFF2-40B4-BE49-F238E27FC236}">
-                <a16:creationId xmlns:a16="http://schemas.microsoft.com/office/drawing/2014/main" id="{6C3FD308-1AF1-CDC8-CE51-5353666BF7E7}"/>
+                <a16:creationId xmlns:a16="http://schemas.microsoft.com/office/drawing/2014/main" id="{33FFB1AF-E733-E91F-8B82-8118A9F5C6F1}"/>
               </a:ext>
             </a:extLst>
           </p:cNvPr>
@@ -6732,8 +6732,8 @@
         </p:blipFill>
         <p:spPr>
           <a:xfrm>
-            <a:off x="0" y="967589"/>
-            <a:ext cx="9144000" cy="3208322"/>
+            <a:off x="0" y="1007073"/>
+            <a:ext cx="9144000" cy="3272229"/>
           </a:xfrm>
           <a:prstGeom prst="rect">
             <a:avLst/>
@@ -6810,10 +6810,10 @@
       </p:sp>
       <p:pic>
         <p:nvPicPr>
-          <p:cNvPr id="5" name="Imagen 4">
+          <p:cNvPr id="4" name="Imagen 3">
             <a:extLst>
               <a:ext uri="{FF2B5EF4-FFF2-40B4-BE49-F238E27FC236}">
-                <a16:creationId xmlns:a16="http://schemas.microsoft.com/office/drawing/2014/main" id="{C266AA9B-F4B7-AD64-B49A-36744BC9DA69}"/>
+                <a16:creationId xmlns:a16="http://schemas.microsoft.com/office/drawing/2014/main" id="{1CD5E1EF-FDFC-E0CC-FEA4-0985BD4F3AB0}"/>
               </a:ext>
             </a:extLst>
           </p:cNvPr>
@@ -6830,8 +6830,8 @@
         </p:blipFill>
         <p:spPr>
           <a:xfrm>
-            <a:off x="0" y="1235640"/>
-            <a:ext cx="9144000" cy="2815096"/>
+            <a:off x="0" y="1293408"/>
+            <a:ext cx="9144000" cy="2699560"/>
           </a:xfrm>
           <a:prstGeom prst="rect">
             <a:avLst/>
@@ -6908,10 +6908,10 @@
       </p:sp>
       <p:pic>
         <p:nvPicPr>
-          <p:cNvPr id="4" name="Imagen 3">
+          <p:cNvPr id="7" name="Imagen 6">
             <a:extLst>
               <a:ext uri="{FF2B5EF4-FFF2-40B4-BE49-F238E27FC236}">
-                <a16:creationId xmlns:a16="http://schemas.microsoft.com/office/drawing/2014/main" id="{941A173D-9E1A-BD40-E483-DBD524169862}"/>
+                <a16:creationId xmlns:a16="http://schemas.microsoft.com/office/drawing/2014/main" id="{F9BDC336-8949-9AC9-2C49-4E5C51B7B754}"/>
               </a:ext>
             </a:extLst>
           </p:cNvPr>
@@ -6928,8 +6928,8 @@
         </p:blipFill>
         <p:spPr>
           <a:xfrm>
-            <a:off x="0" y="733750"/>
-            <a:ext cx="9144000" cy="3818875"/>
+            <a:off x="0" y="721988"/>
+            <a:ext cx="9144000" cy="3842399"/>
           </a:xfrm>
           <a:prstGeom prst="rect">
             <a:avLst/>
@@ -7006,10 +7006,10 @@
       </p:sp>
       <p:pic>
         <p:nvPicPr>
-          <p:cNvPr id="3" name="Imagen 2">
+          <p:cNvPr id="4" name="Imagen 3">
             <a:extLst>
               <a:ext uri="{FF2B5EF4-FFF2-40B4-BE49-F238E27FC236}">
-                <a16:creationId xmlns:a16="http://schemas.microsoft.com/office/drawing/2014/main" id="{A696C7E4-3F38-E263-D3D0-EC51A32EDFF7}"/>
+                <a16:creationId xmlns:a16="http://schemas.microsoft.com/office/drawing/2014/main" id="{BC4D55E4-D6CD-3025-182F-F3C2A22FEDD4}"/>
               </a:ext>
             </a:extLst>
           </p:cNvPr>
@@ -7026,8 +7026,8 @@
         </p:blipFill>
         <p:spPr>
           <a:xfrm>
-            <a:off x="0" y="400674"/>
-            <a:ext cx="9144000" cy="4342151"/>
+            <a:off x="1202197" y="580017"/>
+            <a:ext cx="6666581" cy="4126342"/>
           </a:xfrm>
           <a:prstGeom prst="rect">
             <a:avLst/>
